--- a/For System administrators/9. Docker Station/Установка и настройка Docker.pptx
+++ b/For System administrators/9. Docker Station/Установка и настройка Docker.pptx
@@ -300,7 +300,7 @@
           <a:p>
             <a:fld id="{B4C71EC6-210F-42DE-9C53-41977AD35B3D}" type="datetimeFigureOut">
               <a:rPr lang="ru-RU" smtClean="0"/>
-              <a:t>05.01.2025</a:t>
+              <a:t>17.10.2026</a:t>
             </a:fld>
             <a:endParaRPr lang="ru-RU"/>
           </a:p>
@@ -465,7 +465,7 @@
           <a:p>
             <a:fld id="{B4C71EC6-210F-42DE-9C53-41977AD35B3D}" type="datetimeFigureOut">
               <a:rPr lang="ru-RU" smtClean="0"/>
-              <a:t>05.01.2025</a:t>
+              <a:t>17.10.2026</a:t>
             </a:fld>
             <a:endParaRPr lang="ru-RU"/>
           </a:p>
@@ -640,7 +640,7 @@
           <a:p>
             <a:fld id="{B4C71EC6-210F-42DE-9C53-41977AD35B3D}" type="datetimeFigureOut">
               <a:rPr lang="ru-RU" smtClean="0"/>
-              <a:t>05.01.2025</a:t>
+              <a:t>17.10.2026</a:t>
             </a:fld>
             <a:endParaRPr lang="ru-RU"/>
           </a:p>
@@ -805,7 +805,7 @@
           <a:p>
             <a:fld id="{B4C71EC6-210F-42DE-9C53-41977AD35B3D}" type="datetimeFigureOut">
               <a:rPr lang="ru-RU" smtClean="0"/>
-              <a:t>05.01.2025</a:t>
+              <a:t>17.10.2026</a:t>
             </a:fld>
             <a:endParaRPr lang="ru-RU"/>
           </a:p>
@@ -1046,7 +1046,7 @@
           <a:p>
             <a:fld id="{B4C71EC6-210F-42DE-9C53-41977AD35B3D}" type="datetimeFigureOut">
               <a:rPr lang="ru-RU" smtClean="0"/>
-              <a:t>05.01.2025</a:t>
+              <a:t>17.10.2026</a:t>
             </a:fld>
             <a:endParaRPr lang="ru-RU"/>
           </a:p>
@@ -1329,7 +1329,7 @@
           <a:p>
             <a:fld id="{B4C71EC6-210F-42DE-9C53-41977AD35B3D}" type="datetimeFigureOut">
               <a:rPr lang="ru-RU" smtClean="0"/>
-              <a:t>05.01.2025</a:t>
+              <a:t>17.10.2026</a:t>
             </a:fld>
             <a:endParaRPr lang="ru-RU"/>
           </a:p>
@@ -1746,7 +1746,7 @@
           <a:p>
             <a:fld id="{B4C71EC6-210F-42DE-9C53-41977AD35B3D}" type="datetimeFigureOut">
               <a:rPr lang="ru-RU" smtClean="0"/>
-              <a:t>05.01.2025</a:t>
+              <a:t>17.10.2026</a:t>
             </a:fld>
             <a:endParaRPr lang="ru-RU"/>
           </a:p>
@@ -1859,7 +1859,7 @@
           <a:p>
             <a:fld id="{B4C71EC6-210F-42DE-9C53-41977AD35B3D}" type="datetimeFigureOut">
               <a:rPr lang="ru-RU" smtClean="0"/>
-              <a:t>05.01.2025</a:t>
+              <a:t>17.10.2026</a:t>
             </a:fld>
             <a:endParaRPr lang="ru-RU"/>
           </a:p>
@@ -1949,7 +1949,7 @@
           <a:p>
             <a:fld id="{B4C71EC6-210F-42DE-9C53-41977AD35B3D}" type="datetimeFigureOut">
               <a:rPr lang="ru-RU" smtClean="0"/>
-              <a:t>05.01.2025</a:t>
+              <a:t>17.10.2026</a:t>
             </a:fld>
             <a:endParaRPr lang="ru-RU"/>
           </a:p>
@@ -2221,7 +2221,7 @@
           <a:p>
             <a:fld id="{B4C71EC6-210F-42DE-9C53-41977AD35B3D}" type="datetimeFigureOut">
               <a:rPr lang="ru-RU" smtClean="0"/>
-              <a:t>05.01.2025</a:t>
+              <a:t>17.10.2026</a:t>
             </a:fld>
             <a:endParaRPr lang="ru-RU"/>
           </a:p>
@@ -2469,7 +2469,7 @@
           <a:p>
             <a:fld id="{B4C71EC6-210F-42DE-9C53-41977AD35B3D}" type="datetimeFigureOut">
               <a:rPr lang="ru-RU" smtClean="0"/>
-              <a:t>05.01.2025</a:t>
+              <a:t>17.10.2026</a:t>
             </a:fld>
             <a:endParaRPr lang="ru-RU"/>
           </a:p>
@@ -2677,7 +2677,7 @@
           <a:p>
             <a:fld id="{B4C71EC6-210F-42DE-9C53-41977AD35B3D}" type="datetimeFigureOut">
               <a:rPr lang="ru-RU" smtClean="0"/>
-              <a:t>05.01.2025</a:t>
+              <a:t>17.10.2026</a:t>
             </a:fld>
             <a:endParaRPr lang="ru-RU"/>
           </a:p>
@@ -4269,7 +4269,31 @@
                   </a:outerShdw>
                 </a:effectLst>
               </a:rPr>
-              <a:t>Если мы полно копируем данный скрипт, то получаем ошибку. В том числе ошибка о доступе.</a:t>
+              <a:t>Если мы </a:t>
+            </a:r>
+            <a:r>
+              <a:rPr lang="ru-RU" sz="3200" dirty="0" smtClean="0">
+                <a:effectLst>
+                  <a:outerShdw blurRad="38100" dist="38100" dir="2700000" algn="tl">
+                    <a:srgbClr val="000000">
+                      <a:alpha val="43137"/>
+                    </a:srgbClr>
+                  </a:outerShdw>
+                </a:effectLst>
+              </a:rPr>
+              <a:t>просто </a:t>
+            </a:r>
+            <a:r>
+              <a:rPr lang="ru-RU" sz="3200" dirty="0" smtClean="0">
+                <a:effectLst>
+                  <a:outerShdw blurRad="38100" dist="38100" dir="2700000" algn="tl">
+                    <a:srgbClr val="000000">
+                      <a:alpha val="43137"/>
+                    </a:srgbClr>
+                  </a:outerShdw>
+                </a:effectLst>
+              </a:rPr>
+              <a:t>копируем данный скрипт, то получаем ошибку. В том числе ошибка о доступе.</a:t>
             </a:r>
             <a:endParaRPr lang="ru-RU" sz="3200" dirty="0">
               <a:effectLst>
@@ -4711,11 +4735,7 @@
           <a:p>
             <a:r>
               <a:rPr lang="en-US" dirty="0" smtClean="0"/>
-              <a:t>&gt;curl </a:t>
-            </a:r>
-            <a:r>
-              <a:rPr lang="en-US" dirty="0" smtClean="0"/>
-              <a:t>–</a:t>
+              <a:t>&gt;curl –</a:t>
             </a:r>
             <a:r>
               <a:rPr lang="en-US" dirty="0" err="1" smtClean="0"/>
@@ -5278,12 +5298,16 @@
               <a:t>возможно вам повезет или вы работаете непосредственно в </a:t>
             </a:r>
             <a:r>
-              <a:rPr lang="ru-RU" dirty="0" err="1" smtClean="0"/>
-              <a:t>линукс</a:t>
+              <a:rPr lang="en-US" dirty="0" smtClean="0"/>
+              <a:t>Linux</a:t>
             </a:r>
             <a:r>
               <a:rPr lang="ru-RU" dirty="0" smtClean="0"/>
-              <a:t>, тогда сложностей возникнуть не должно.</a:t>
+              <a:t>, </a:t>
+            </a:r>
+            <a:r>
+              <a:rPr lang="ru-RU" dirty="0" smtClean="0"/>
+              <a:t>тогда сложностей возникнуть не должно.</a:t>
             </a:r>
             <a:endParaRPr lang="ru-RU" dirty="0"/>
           </a:p>
